--- a/Fundamentos da Robótica Competitiva e Engenharia de Equipes/FRC UC1.pptx
+++ b/Fundamentos da Robótica Competitiva e Engenharia de Equipes/FRC UC1.pptx
@@ -120,7 +120,7 @@
 
 <file path=ppt/commentAuthors.xml><?xml version="1.0" encoding="utf-8"?>
 <p:cmAuthorLst xmlns:a="http://schemas.openxmlformats.org/drawingml/2006/main" xmlns:r="http://schemas.openxmlformats.org/officeDocument/2006/relationships" xmlns:p="http://schemas.openxmlformats.org/presentationml/2006/main">
-  <p:cmAuthor id="1" name="Djair Oliveira - SENAI RONDONOPOLIS" initials="DOSR" lastIdx="14" clrIdx="0">
+  <p:cmAuthor id="1" name="Djair Oliveira - SENAI RONDONOPOLIS" initials="DOSR" lastIdx="15" clrIdx="0">
     <p:extLst>
       <p:ext uri="{19B8F6BF-5375-455C-9EA6-DF929625EA0E}">
         <p15:presenceInfo xmlns:p15="http://schemas.microsoft.com/office/powerpoint/2012/main" userId="S::djair.oliveira@senaimt.ind.br::62b24908-5a18-4d76-99ce-57c56005ce0f" providerId="AD"/>
@@ -260,6 +260,15 @@
   <p:cm authorId="1" dt="2026-06-19T17:23:25.306" idx="14">
     <p:pos x="5551" y="3005"/>
     <p:text>Para realização da tarefa, é recomendado se usar o modelo oficial como base(Modelo utilizado pelo Diego nas Reuniões), entendendo todos os critérios necessarios.</p:text>
+    <p:extLst>
+      <p:ext uri="{C676402C-5697-4E1C-873F-D02D1690AC5C}">
+        <p15:threadingInfo xmlns:p15="http://schemas.microsoft.com/office/powerpoint/2012/main" timeZoneBias="240"/>
+      </p:ext>
+    </p:extLst>
+  </p:cm>
+  <p:cm authorId="1" dt="2026-06-19T17:43:01.155" idx="15">
+    <p:pos x="5556" y="2027"/>
+    <p:text>Exemplo de Cronograma, AGROBOT Season AGE</p:text>
     <p:extLst>
       <p:ext uri="{C676402C-5697-4E1C-873F-D02D1690AC5C}">
         <p15:threadingInfo xmlns:p15="http://schemas.microsoft.com/office/powerpoint/2012/main" timeZoneBias="240"/>
@@ -11727,6 +11736,7 @@
       <p:pic>
         <p:nvPicPr>
           <p:cNvPr id="6146" name="Picture 2" descr="Cronograma - ícones de hora e data grátis">
+            <a:hlinkClick r:id="rId6"/>
             <a:extLst>
               <a:ext uri="{FF2B5EF4-FFF2-40B4-BE49-F238E27FC236}">
                 <a16:creationId xmlns:a16="http://schemas.microsoft.com/office/drawing/2014/main" id="{464B3E9B-A51E-49D7-8A3D-D6E56702D1BC}"/>
@@ -11739,7 +11749,7 @@
           <p:nvPr/>
         </p:nvPicPr>
         <p:blipFill>
-          <a:blip r:embed="rId6">
+          <a:blip r:embed="rId7">
             <a:extLst>
               <a:ext uri="{28A0092B-C50C-407E-A947-70E740481C1C}">
                 <a14:useLocalDpi xmlns:a14="http://schemas.microsoft.com/office/drawing/2010/main" val="0"/>
@@ -11755,6 +11765,69 @@
           <a:xfrm>
             <a:off x="6616721" y="1983092"/>
             <a:ext cx="2563155" cy="2563155"/>
+          </a:xfrm>
+          <a:prstGeom prst="rect">
+            <a:avLst/>
+          </a:prstGeom>
+          <a:noFill/>
+          <a:extLst>
+            <a:ext uri="{909E8E84-426E-40DD-AFC4-6F175D3DCCD1}">
+              <a14:hiddenFill xmlns:a14="http://schemas.microsoft.com/office/drawing/2010/main">
+                <a:solidFill>
+                  <a:srgbClr val="FFFFFF"/>
+                </a:solidFill>
+              </a14:hiddenFill>
+            </a:ext>
+          </a:extLst>
+        </p:spPr>
+      </p:pic>
+      <p:pic>
+        <p:nvPicPr>
+          <p:cNvPr id="22" name="Picture 10" descr="Clicando - ícones de gestos grátis">
+            <a:extLst>
+              <a:ext uri="{FF2B5EF4-FFF2-40B4-BE49-F238E27FC236}">
+                <a16:creationId xmlns:a16="http://schemas.microsoft.com/office/drawing/2014/main" id="{EE71E1AF-655E-4285-9444-53EC8D6121A8}"/>
+              </a:ext>
+            </a:extLst>
+          </p:cNvPr>
+          <p:cNvPicPr>
+            <a:picLocks noChangeAspect="1" noChangeArrowheads="1"/>
+          </p:cNvPicPr>
+          <p:nvPr/>
+        </p:nvPicPr>
+        <p:blipFill>
+          <a:blip r:embed="rId8">
+            <a:duotone>
+              <a:prstClr val="black"/>
+              <a:schemeClr val="accent3">
+                <a:tint val="45000"/>
+                <a:satMod val="400000"/>
+              </a:schemeClr>
+            </a:duotone>
+            <a:extLst>
+              <a:ext uri="{BEBA8EAE-BF5A-486C-A8C5-ECC9F3942E4B}">
+                <a14:imgProps xmlns:a14="http://schemas.microsoft.com/office/drawing/2010/main">
+                  <a14:imgLayer r:embed="rId9">
+                    <a14:imgEffect>
+                      <a14:artisticPhotocopy/>
+                    </a14:imgEffect>
+                  </a14:imgLayer>
+                </a14:imgProps>
+              </a:ext>
+              <a:ext uri="{28A0092B-C50C-407E-A947-70E740481C1C}">
+                <a14:useLocalDpi xmlns:a14="http://schemas.microsoft.com/office/drawing/2010/main" val="0"/>
+              </a:ext>
+            </a:extLst>
+          </a:blip>
+          <a:srcRect/>
+          <a:stretch>
+            <a:fillRect/>
+          </a:stretch>
+        </p:blipFill>
+        <p:spPr bwMode="auto">
+          <a:xfrm>
+            <a:off x="6755293" y="3421112"/>
+            <a:ext cx="1143397" cy="1143397"/>
           </a:xfrm>
           <a:prstGeom prst="rect">
             <a:avLst/>
